--- a/Chap/Prog02/Presentations/Lists.pptx
+++ b/Chap/Prog02/Presentations/Lists.pptx
@@ -293,7 +293,7 @@
           <a:p>
             <a:fld id="{E15B7D8E-2A20-4C0E-991C-872DBB7459A8}" type="datetimeFigureOut">
               <a:rPr lang="da-DK" smtClean="0"/>
-              <a:t>24-08-2024</a:t>
+              <a:t>07-10-2024</a:t>
             </a:fld>
             <a:endParaRPr lang="da-DK"/>
           </a:p>
@@ -351,13 +351,13 @@
   <p:clrMapOvr>
     <a:masterClrMapping/>
   </p:clrMapOvr>
-  <mc:AlternateContent xmlns:mc="http://schemas.openxmlformats.org/markup-compatibility/2006">
-    <mc:Choice xmlns:p14="http://schemas.microsoft.com/office/powerpoint/2010/main" Requires="p14">
+  <mc:AlternateContent xmlns:mc="http://schemas.openxmlformats.org/markup-compatibility/2006" xmlns:p14="http://schemas.microsoft.com/office/powerpoint/2010/main">
+    <mc:Choice Requires="p14">
       <p:transition spd="med" p14:dur="700">
         <p:fade/>
       </p:transition>
     </mc:Choice>
-    <mc:Fallback>
+    <mc:Fallback xmlns="">
       <p:transition spd="med">
         <p:fade/>
       </p:transition>
@@ -473,7 +473,7 @@
           <a:p>
             <a:fld id="{E15B7D8E-2A20-4C0E-991C-872DBB7459A8}" type="datetimeFigureOut">
               <a:rPr lang="da-DK" smtClean="0"/>
-              <a:t>24-08-2024</a:t>
+              <a:t>07-10-2024</a:t>
             </a:fld>
             <a:endParaRPr lang="da-DK"/>
           </a:p>
@@ -531,13 +531,13 @@
   <p:clrMapOvr>
     <a:masterClrMapping/>
   </p:clrMapOvr>
-  <mc:AlternateContent xmlns:mc="http://schemas.openxmlformats.org/markup-compatibility/2006">
-    <mc:Choice xmlns:p14="http://schemas.microsoft.com/office/powerpoint/2010/main" Requires="p14">
+  <mc:AlternateContent xmlns:mc="http://schemas.openxmlformats.org/markup-compatibility/2006" xmlns:p14="http://schemas.microsoft.com/office/powerpoint/2010/main">
+    <mc:Choice Requires="p14">
       <p:transition spd="med" p14:dur="700">
         <p:fade/>
       </p:transition>
     </mc:Choice>
-    <mc:Fallback>
+    <mc:Fallback xmlns="">
       <p:transition spd="med">
         <p:fade/>
       </p:transition>
@@ -663,7 +663,7 @@
           <a:p>
             <a:fld id="{E15B7D8E-2A20-4C0E-991C-872DBB7459A8}" type="datetimeFigureOut">
               <a:rPr lang="da-DK" smtClean="0"/>
-              <a:t>24-08-2024</a:t>
+              <a:t>07-10-2024</a:t>
             </a:fld>
             <a:endParaRPr lang="da-DK"/>
           </a:p>
@@ -721,13 +721,13 @@
   <p:clrMapOvr>
     <a:masterClrMapping/>
   </p:clrMapOvr>
-  <mc:AlternateContent xmlns:mc="http://schemas.openxmlformats.org/markup-compatibility/2006">
-    <mc:Choice xmlns:p14="http://schemas.microsoft.com/office/powerpoint/2010/main" Requires="p14">
+  <mc:AlternateContent xmlns:mc="http://schemas.openxmlformats.org/markup-compatibility/2006" xmlns:p14="http://schemas.microsoft.com/office/powerpoint/2010/main">
+    <mc:Choice Requires="p14">
       <p:transition spd="med" p14:dur="700">
         <p:fade/>
       </p:transition>
     </mc:Choice>
-    <mc:Fallback>
+    <mc:Fallback xmlns="">
       <p:transition spd="med">
         <p:fade/>
       </p:transition>
@@ -843,7 +843,7 @@
           <a:p>
             <a:fld id="{E15B7D8E-2A20-4C0E-991C-872DBB7459A8}" type="datetimeFigureOut">
               <a:rPr lang="da-DK" smtClean="0"/>
-              <a:t>24-08-2024</a:t>
+              <a:t>07-10-2024</a:t>
             </a:fld>
             <a:endParaRPr lang="da-DK"/>
           </a:p>
@@ -901,13 +901,13 @@
   <p:clrMapOvr>
     <a:masterClrMapping/>
   </p:clrMapOvr>
-  <mc:AlternateContent xmlns:mc="http://schemas.openxmlformats.org/markup-compatibility/2006">
-    <mc:Choice xmlns:p14="http://schemas.microsoft.com/office/powerpoint/2010/main" Requires="p14">
+  <mc:AlternateContent xmlns:mc="http://schemas.openxmlformats.org/markup-compatibility/2006" xmlns:p14="http://schemas.microsoft.com/office/powerpoint/2010/main">
+    <mc:Choice Requires="p14">
       <p:transition spd="med" p14:dur="700">
         <p:fade/>
       </p:transition>
     </mc:Choice>
-    <mc:Fallback>
+    <mc:Fallback xmlns="">
       <p:transition spd="med">
         <p:fade/>
       </p:transition>
@@ -1100,7 +1100,7 @@
           <a:p>
             <a:fld id="{E15B7D8E-2A20-4C0E-991C-872DBB7459A8}" type="datetimeFigureOut">
               <a:rPr lang="da-DK" smtClean="0"/>
-              <a:t>24-08-2024</a:t>
+              <a:t>07-10-2024</a:t>
             </a:fld>
             <a:endParaRPr lang="da-DK"/>
           </a:p>
@@ -1158,13 +1158,13 @@
   <p:clrMapOvr>
     <a:masterClrMapping/>
   </p:clrMapOvr>
-  <mc:AlternateContent xmlns:mc="http://schemas.openxmlformats.org/markup-compatibility/2006">
-    <mc:Choice xmlns:p14="http://schemas.microsoft.com/office/powerpoint/2010/main" Requires="p14">
+  <mc:AlternateContent xmlns:mc="http://schemas.openxmlformats.org/markup-compatibility/2006" xmlns:p14="http://schemas.microsoft.com/office/powerpoint/2010/main">
+    <mc:Choice Requires="p14">
       <p:transition spd="med" p14:dur="700">
         <p:fade/>
       </p:transition>
     </mc:Choice>
-    <mc:Fallback>
+    <mc:Fallback xmlns="">
       <p:transition spd="med">
         <p:fade/>
       </p:transition>
@@ -1341,7 +1341,7 @@
           <a:p>
             <a:fld id="{E15B7D8E-2A20-4C0E-991C-872DBB7459A8}" type="datetimeFigureOut">
               <a:rPr lang="da-DK" smtClean="0"/>
-              <a:t>24-08-2024</a:t>
+              <a:t>07-10-2024</a:t>
             </a:fld>
             <a:endParaRPr lang="da-DK"/>
           </a:p>
@@ -1399,13 +1399,13 @@
   <p:clrMapOvr>
     <a:masterClrMapping/>
   </p:clrMapOvr>
-  <mc:AlternateContent xmlns:mc="http://schemas.openxmlformats.org/markup-compatibility/2006">
-    <mc:Choice xmlns:p14="http://schemas.microsoft.com/office/powerpoint/2010/main" Requires="p14">
+  <mc:AlternateContent xmlns:mc="http://schemas.openxmlformats.org/markup-compatibility/2006" xmlns:p14="http://schemas.microsoft.com/office/powerpoint/2010/main">
+    <mc:Choice Requires="p14">
       <p:transition spd="med" p14:dur="700">
         <p:fade/>
       </p:transition>
     </mc:Choice>
-    <mc:Fallback>
+    <mc:Fallback xmlns="">
       <p:transition spd="med">
         <p:fade/>
       </p:transition>
@@ -1717,7 +1717,7 @@
           <a:p>
             <a:fld id="{E15B7D8E-2A20-4C0E-991C-872DBB7459A8}" type="datetimeFigureOut">
               <a:rPr lang="da-DK" smtClean="0"/>
-              <a:t>24-08-2024</a:t>
+              <a:t>07-10-2024</a:t>
             </a:fld>
             <a:endParaRPr lang="da-DK"/>
           </a:p>
@@ -1775,13 +1775,13 @@
   <p:clrMapOvr>
     <a:masterClrMapping/>
   </p:clrMapOvr>
-  <mc:AlternateContent xmlns:mc="http://schemas.openxmlformats.org/markup-compatibility/2006">
-    <mc:Choice xmlns:p14="http://schemas.microsoft.com/office/powerpoint/2010/main" Requires="p14">
+  <mc:AlternateContent xmlns:mc="http://schemas.openxmlformats.org/markup-compatibility/2006" xmlns:p14="http://schemas.microsoft.com/office/powerpoint/2010/main">
+    <mc:Choice Requires="p14">
       <p:transition spd="med" p14:dur="700">
         <p:fade/>
       </p:transition>
     </mc:Choice>
-    <mc:Fallback>
+    <mc:Fallback xmlns="">
       <p:transition spd="med">
         <p:fade/>
       </p:transition>
@@ -1846,7 +1846,7 @@
           <a:p>
             <a:fld id="{E15B7D8E-2A20-4C0E-991C-872DBB7459A8}" type="datetimeFigureOut">
               <a:rPr lang="da-DK" smtClean="0"/>
-              <a:t>24-08-2024</a:t>
+              <a:t>07-10-2024</a:t>
             </a:fld>
             <a:endParaRPr lang="da-DK"/>
           </a:p>
@@ -1904,13 +1904,13 @@
   <p:clrMapOvr>
     <a:masterClrMapping/>
   </p:clrMapOvr>
-  <mc:AlternateContent xmlns:mc="http://schemas.openxmlformats.org/markup-compatibility/2006">
-    <mc:Choice xmlns:p14="http://schemas.microsoft.com/office/powerpoint/2010/main" Requires="p14">
+  <mc:AlternateContent xmlns:mc="http://schemas.openxmlformats.org/markup-compatibility/2006" xmlns:p14="http://schemas.microsoft.com/office/powerpoint/2010/main">
+    <mc:Choice Requires="p14">
       <p:transition spd="med" p14:dur="700">
         <p:fade/>
       </p:transition>
     </mc:Choice>
-    <mc:Fallback>
+    <mc:Fallback xmlns="">
       <p:transition spd="med">
         <p:fade/>
       </p:transition>
@@ -1953,7 +1953,7 @@
           <a:p>
             <a:fld id="{E15B7D8E-2A20-4C0E-991C-872DBB7459A8}" type="datetimeFigureOut">
               <a:rPr lang="da-DK" smtClean="0"/>
-              <a:t>24-08-2024</a:t>
+              <a:t>07-10-2024</a:t>
             </a:fld>
             <a:endParaRPr lang="da-DK"/>
           </a:p>
@@ -2011,13 +2011,13 @@
   <p:clrMapOvr>
     <a:masterClrMapping/>
   </p:clrMapOvr>
-  <mc:AlternateContent xmlns:mc="http://schemas.openxmlformats.org/markup-compatibility/2006">
-    <mc:Choice xmlns:p14="http://schemas.microsoft.com/office/powerpoint/2010/main" Requires="p14">
+  <mc:AlternateContent xmlns:mc="http://schemas.openxmlformats.org/markup-compatibility/2006" xmlns:p14="http://schemas.microsoft.com/office/powerpoint/2010/main">
+    <mc:Choice Requires="p14">
       <p:transition spd="med" p14:dur="700">
         <p:fade/>
       </p:transition>
     </mc:Choice>
-    <mc:Fallback>
+    <mc:Fallback xmlns="">
       <p:transition spd="med">
         <p:fade/>
       </p:transition>
@@ -2240,7 +2240,7 @@
           <a:p>
             <a:fld id="{E15B7D8E-2A20-4C0E-991C-872DBB7459A8}" type="datetimeFigureOut">
               <a:rPr lang="da-DK" smtClean="0"/>
-              <a:t>24-08-2024</a:t>
+              <a:t>07-10-2024</a:t>
             </a:fld>
             <a:endParaRPr lang="da-DK"/>
           </a:p>
@@ -2298,13 +2298,13 @@
   <p:clrMapOvr>
     <a:masterClrMapping/>
   </p:clrMapOvr>
-  <mc:AlternateContent xmlns:mc="http://schemas.openxmlformats.org/markup-compatibility/2006">
-    <mc:Choice xmlns:p14="http://schemas.microsoft.com/office/powerpoint/2010/main" Requires="p14">
+  <mc:AlternateContent xmlns:mc="http://schemas.openxmlformats.org/markup-compatibility/2006" xmlns:p14="http://schemas.microsoft.com/office/powerpoint/2010/main">
+    <mc:Choice Requires="p14">
       <p:transition spd="med" p14:dur="700">
         <p:fade/>
       </p:transition>
     </mc:Choice>
-    <mc:Fallback>
+    <mc:Fallback xmlns="">
       <p:transition spd="med">
         <p:fade/>
       </p:transition>
@@ -2504,7 +2504,7 @@
           <a:p>
             <a:fld id="{E15B7D8E-2A20-4C0E-991C-872DBB7459A8}" type="datetimeFigureOut">
               <a:rPr lang="da-DK" smtClean="0"/>
-              <a:t>24-08-2024</a:t>
+              <a:t>07-10-2024</a:t>
             </a:fld>
             <a:endParaRPr lang="da-DK"/>
           </a:p>
@@ -2562,13 +2562,13 @@
   <p:clrMapOvr>
     <a:masterClrMapping/>
   </p:clrMapOvr>
-  <mc:AlternateContent xmlns:mc="http://schemas.openxmlformats.org/markup-compatibility/2006">
-    <mc:Choice xmlns:p14="http://schemas.microsoft.com/office/powerpoint/2010/main" Requires="p14">
+  <mc:AlternateContent xmlns:mc="http://schemas.openxmlformats.org/markup-compatibility/2006" xmlns:p14="http://schemas.microsoft.com/office/powerpoint/2010/main">
+    <mc:Choice Requires="p14">
       <p:transition spd="med" p14:dur="700">
         <p:fade/>
       </p:transition>
     </mc:Choice>
-    <mc:Fallback>
+    <mc:Fallback xmlns="">
       <p:transition spd="med">
         <p:fade/>
       </p:transition>
@@ -2727,7 +2727,7 @@
           <a:p>
             <a:fld id="{E15B7D8E-2A20-4C0E-991C-872DBB7459A8}" type="datetimeFigureOut">
               <a:rPr lang="da-DK" smtClean="0"/>
-              <a:t>24-08-2024</a:t>
+              <a:t>07-10-2024</a:t>
             </a:fld>
             <a:endParaRPr lang="da-DK"/>
           </a:p>
@@ -2832,13 +2832,13 @@
     <p:sldLayoutId id="2147483658" r:id="rId10"/>
     <p:sldLayoutId id="2147483659" r:id="rId11"/>
   </p:sldLayoutIdLst>
-  <mc:AlternateContent xmlns:mc="http://schemas.openxmlformats.org/markup-compatibility/2006">
-    <mc:Choice xmlns:p14="http://schemas.microsoft.com/office/powerpoint/2010/main" Requires="p14">
+  <mc:AlternateContent xmlns:mc="http://schemas.openxmlformats.org/markup-compatibility/2006" xmlns:p14="http://schemas.microsoft.com/office/powerpoint/2010/main">
+    <mc:Choice Requires="p14">
       <p:transition spd="med" p14:dur="700">
         <p:fade/>
       </p:transition>
     </mc:Choice>
-    <mc:Fallback>
+    <mc:Fallback xmlns="">
       <p:transition spd="med">
         <p:fade/>
       </p:transition>
@@ -3196,13 +3196,13 @@
   <p:clrMapOvr>
     <a:masterClrMapping/>
   </p:clrMapOvr>
-  <mc:AlternateContent xmlns:mc="http://schemas.openxmlformats.org/markup-compatibility/2006">
-    <mc:Choice xmlns:p14="http://schemas.microsoft.com/office/powerpoint/2010/main" Requires="p14">
+  <mc:AlternateContent xmlns:mc="http://schemas.openxmlformats.org/markup-compatibility/2006" xmlns:p14="http://schemas.microsoft.com/office/powerpoint/2010/main">
+    <mc:Choice Requires="p14">
       <p:transition spd="med" p14:dur="700">
         <p:fade/>
       </p:transition>
     </mc:Choice>
-    <mc:Fallback>
+    <mc:Fallback xmlns="">
       <p:transition spd="med">
         <p:fade/>
       </p:transition>
@@ -3314,13 +3314,13 @@
   <p:clrMapOvr>
     <a:masterClrMapping/>
   </p:clrMapOvr>
-  <mc:AlternateContent xmlns:mc="http://schemas.openxmlformats.org/markup-compatibility/2006">
-    <mc:Choice xmlns:p14="http://schemas.microsoft.com/office/powerpoint/2010/main" Requires="p14">
+  <mc:AlternateContent xmlns:mc="http://schemas.openxmlformats.org/markup-compatibility/2006" xmlns:p14="http://schemas.microsoft.com/office/powerpoint/2010/main">
+    <mc:Choice Requires="p14">
       <p:transition spd="med" p14:dur="700">
         <p:fade/>
       </p:transition>
     </mc:Choice>
-    <mc:Fallback>
+    <mc:Fallback xmlns="">
       <p:transition spd="med">
         <p:fade/>
       </p:transition>
@@ -3438,13 +3438,13 @@
   <p:clrMapOvr>
     <a:masterClrMapping/>
   </p:clrMapOvr>
-  <mc:AlternateContent xmlns:mc="http://schemas.openxmlformats.org/markup-compatibility/2006">
-    <mc:Choice xmlns:p14="http://schemas.microsoft.com/office/powerpoint/2010/main" Requires="p14">
+  <mc:AlternateContent xmlns:mc="http://schemas.openxmlformats.org/markup-compatibility/2006" xmlns:p14="http://schemas.microsoft.com/office/powerpoint/2010/main">
+    <mc:Choice Requires="p14">
       <p:transition spd="med" p14:dur="700">
         <p:fade/>
       </p:transition>
     </mc:Choice>
-    <mc:Fallback>
+    <mc:Fallback xmlns="">
       <p:transition spd="med">
         <p:fade/>
       </p:transition>
@@ -3676,13 +3676,13 @@
   <p:clrMapOvr>
     <a:masterClrMapping/>
   </p:clrMapOvr>
-  <mc:AlternateContent xmlns:mc="http://schemas.openxmlformats.org/markup-compatibility/2006">
-    <mc:Choice xmlns:p14="http://schemas.microsoft.com/office/powerpoint/2010/main" Requires="p14">
+  <mc:AlternateContent xmlns:mc="http://schemas.openxmlformats.org/markup-compatibility/2006" xmlns:p14="http://schemas.microsoft.com/office/powerpoint/2010/main">
+    <mc:Choice Requires="p14">
       <p:transition spd="med" p14:dur="700">
         <p:fade/>
       </p:transition>
     </mc:Choice>
-    <mc:Fallback>
+    <mc:Fallback xmlns="">
       <p:transition spd="med">
         <p:fade/>
       </p:transition>
@@ -4080,13 +4080,13 @@
   <p:clrMapOvr>
     <a:masterClrMapping/>
   </p:clrMapOvr>
-  <mc:AlternateContent xmlns:mc="http://schemas.openxmlformats.org/markup-compatibility/2006">
-    <mc:Choice xmlns:p14="http://schemas.microsoft.com/office/powerpoint/2010/main" Requires="p14">
+  <mc:AlternateContent xmlns:mc="http://schemas.openxmlformats.org/markup-compatibility/2006" xmlns:p14="http://schemas.microsoft.com/office/powerpoint/2010/main">
+    <mc:Choice Requires="p14">
       <p:transition spd="med" p14:dur="700">
         <p:fade/>
       </p:transition>
     </mc:Choice>
-    <mc:Fallback>
+    <mc:Fallback xmlns="">
       <p:transition spd="med">
         <p:fade/>
       </p:transition>
@@ -4561,13 +4561,13 @@
   <p:clrMapOvr>
     <a:masterClrMapping/>
   </p:clrMapOvr>
-  <mc:AlternateContent xmlns:mc="http://schemas.openxmlformats.org/markup-compatibility/2006">
-    <mc:Choice xmlns:p14="http://schemas.microsoft.com/office/powerpoint/2010/main" Requires="p14">
+  <mc:AlternateContent xmlns:mc="http://schemas.openxmlformats.org/markup-compatibility/2006" xmlns:p14="http://schemas.microsoft.com/office/powerpoint/2010/main">
+    <mc:Choice Requires="p14">
       <p:transition spd="med" p14:dur="700">
         <p:fade/>
       </p:transition>
     </mc:Choice>
-    <mc:Fallback>
+    <mc:Fallback xmlns="">
       <p:transition spd="med">
         <p:fade/>
       </p:transition>
@@ -4992,13 +4992,13 @@
   <p:clrMapOvr>
     <a:masterClrMapping/>
   </p:clrMapOvr>
-  <mc:AlternateContent xmlns:mc="http://schemas.openxmlformats.org/markup-compatibility/2006">
-    <mc:Choice xmlns:p14="http://schemas.microsoft.com/office/powerpoint/2010/main" Requires="p14">
+  <mc:AlternateContent xmlns:mc="http://schemas.openxmlformats.org/markup-compatibility/2006" xmlns:p14="http://schemas.microsoft.com/office/powerpoint/2010/main">
+    <mc:Choice Requires="p14">
       <p:transition spd="med" p14:dur="700">
         <p:fade/>
       </p:transition>
     </mc:Choice>
-    <mc:Fallback>
+    <mc:Fallback xmlns="">
       <p:transition spd="med">
         <p:fade/>
       </p:transition>
@@ -5490,13 +5490,13 @@
   <p:clrMapOvr>
     <a:masterClrMapping/>
   </p:clrMapOvr>
-  <mc:AlternateContent xmlns:mc="http://schemas.openxmlformats.org/markup-compatibility/2006">
-    <mc:Choice xmlns:p14="http://schemas.microsoft.com/office/powerpoint/2010/main" Requires="p14">
+  <mc:AlternateContent xmlns:mc="http://schemas.openxmlformats.org/markup-compatibility/2006" xmlns:p14="http://schemas.microsoft.com/office/powerpoint/2010/main">
+    <mc:Choice Requires="p14">
       <p:transition spd="med" p14:dur="700">
         <p:fade/>
       </p:transition>
     </mc:Choice>
-    <mc:Fallback>
+    <mc:Fallback xmlns="">
       <p:transition spd="med">
         <p:fade/>
       </p:transition>
@@ -5901,13 +5901,13 @@
   <p:clrMapOvr>
     <a:masterClrMapping/>
   </p:clrMapOvr>
-  <mc:AlternateContent xmlns:mc="http://schemas.openxmlformats.org/markup-compatibility/2006">
-    <mc:Choice xmlns:p14="http://schemas.microsoft.com/office/powerpoint/2010/main" Requires="p14">
+  <mc:AlternateContent xmlns:mc="http://schemas.openxmlformats.org/markup-compatibility/2006" xmlns:p14="http://schemas.microsoft.com/office/powerpoint/2010/main">
+    <mc:Choice Requires="p14">
       <p:transition spd="med" p14:dur="700">
         <p:fade/>
       </p:transition>
     </mc:Choice>
-    <mc:Fallback>
+    <mc:Fallback xmlns="">
       <p:transition spd="med">
         <p:fade/>
       </p:transition>
@@ -6527,13 +6527,13 @@
   <p:clrMapOvr>
     <a:masterClrMapping/>
   </p:clrMapOvr>
-  <mc:AlternateContent xmlns:mc="http://schemas.openxmlformats.org/markup-compatibility/2006">
-    <mc:Choice xmlns:p14="http://schemas.microsoft.com/office/powerpoint/2010/main" Requires="p14">
+  <mc:AlternateContent xmlns:mc="http://schemas.openxmlformats.org/markup-compatibility/2006" xmlns:p14="http://schemas.microsoft.com/office/powerpoint/2010/main">
+    <mc:Choice Requires="p14">
       <p:transition spd="med" p14:dur="700">
         <p:fade/>
       </p:transition>
     </mc:Choice>
-    <mc:Fallback>
+    <mc:Fallback xmlns="">
       <p:transition spd="med">
         <p:fade/>
       </p:transition>
@@ -6900,13 +6900,13 @@
   <p:clrMapOvr>
     <a:masterClrMapping/>
   </p:clrMapOvr>
-  <mc:AlternateContent xmlns:mc="http://schemas.openxmlformats.org/markup-compatibility/2006">
-    <mc:Choice xmlns:p14="http://schemas.microsoft.com/office/powerpoint/2010/main" Requires="p14">
+  <mc:AlternateContent xmlns:mc="http://schemas.openxmlformats.org/markup-compatibility/2006" xmlns:p14="http://schemas.microsoft.com/office/powerpoint/2010/main">
+    <mc:Choice Requires="p14">
       <p:transition spd="med" p14:dur="700">
         <p:fade/>
       </p:transition>
     </mc:Choice>
-    <mc:Fallback>
+    <mc:Fallback xmlns="">
       <p:transition spd="med">
         <p:fade/>
       </p:transition>
@@ -7089,13 +7089,13 @@
   <p:clrMapOvr>
     <a:masterClrMapping/>
   </p:clrMapOvr>
-  <mc:AlternateContent xmlns:mc="http://schemas.openxmlformats.org/markup-compatibility/2006">
-    <mc:Choice xmlns:p14="http://schemas.microsoft.com/office/powerpoint/2010/main" Requires="p14">
+  <mc:AlternateContent xmlns:mc="http://schemas.openxmlformats.org/markup-compatibility/2006" xmlns:p14="http://schemas.microsoft.com/office/powerpoint/2010/main">
+    <mc:Choice Requires="p14">
       <p:transition spd="med" p14:dur="700">
         <p:fade/>
       </p:transition>
     </mc:Choice>
-    <mc:Fallback>
+    <mc:Fallback xmlns="">
       <p:transition spd="med">
         <p:fade/>
       </p:transition>
@@ -7601,13 +7601,13 @@
   <p:clrMapOvr>
     <a:masterClrMapping/>
   </p:clrMapOvr>
-  <mc:AlternateContent xmlns:mc="http://schemas.openxmlformats.org/markup-compatibility/2006">
-    <mc:Choice xmlns:p14="http://schemas.microsoft.com/office/powerpoint/2010/main" Requires="p14">
+  <mc:AlternateContent xmlns:mc="http://schemas.openxmlformats.org/markup-compatibility/2006" xmlns:p14="http://schemas.microsoft.com/office/powerpoint/2010/main">
+    <mc:Choice Requires="p14">
       <p:transition spd="med" p14:dur="700">
         <p:fade/>
       </p:transition>
     </mc:Choice>
-    <mc:Fallback>
+    <mc:Fallback xmlns="">
       <p:transition spd="med">
         <p:fade/>
       </p:transition>
@@ -8053,13 +8053,13 @@
   <p:clrMapOvr>
     <a:masterClrMapping/>
   </p:clrMapOvr>
-  <mc:AlternateContent xmlns:mc="http://schemas.openxmlformats.org/markup-compatibility/2006">
-    <mc:Choice xmlns:p14="http://schemas.microsoft.com/office/powerpoint/2010/main" Requires="p14">
+  <mc:AlternateContent xmlns:mc="http://schemas.openxmlformats.org/markup-compatibility/2006" xmlns:p14="http://schemas.microsoft.com/office/powerpoint/2010/main">
+    <mc:Choice Requires="p14">
       <p:transition spd="med" p14:dur="700">
         <p:fade/>
       </p:transition>
     </mc:Choice>
-    <mc:Fallback>
+    <mc:Fallback xmlns="">
       <p:transition spd="med">
         <p:fade/>
       </p:transition>
@@ -8108,28 +8108,28 @@
           <a:lstStyle/>
           <a:p>
             <a:r>
-              <a:rPr lang="da-DK" sz="3200" b="1">
+              <a:rPr lang="da-DK" sz="3200" b="1" dirty="0">
                 <a:latin typeface="Consolas" panose="020B0609020204030204" pitchFamily="49" charset="0"/>
               </a:rPr>
               <a:t>foreach (</a:t>
             </a:r>
             <a:r>
-              <a:rPr lang="da-DK" sz="3200" b="1">
+              <a:rPr lang="da-DK" sz="3200" b="1" dirty="0" err="1">
                 <a:solidFill>
                   <a:srgbClr val="0070C0"/>
                 </a:solidFill>
                 <a:latin typeface="Consolas" panose="020B0609020204030204" pitchFamily="49" charset="0"/>
               </a:rPr>
-              <a:t>var</a:t>
-            </a:r>
-            <a:r>
-              <a:rPr lang="da-DK" sz="3200" b="1">
+              <a:t>int</a:t>
+            </a:r>
+            <a:r>
+              <a:rPr lang="da-DK" sz="3200" b="1" dirty="0">
                 <a:latin typeface="Consolas" panose="020B0609020204030204" pitchFamily="49" charset="0"/>
               </a:rPr>
               <a:t> age </a:t>
             </a:r>
             <a:r>
-              <a:rPr lang="da-DK" sz="3200" b="1">
+              <a:rPr lang="da-DK" sz="3200" b="1" dirty="0">
                 <a:solidFill>
                   <a:srgbClr val="0070C0"/>
                 </a:solidFill>
@@ -8138,7 +8138,7 @@
               <a:t>in</a:t>
             </a:r>
             <a:r>
-              <a:rPr lang="da-DK" sz="3200" b="1">
+              <a:rPr lang="da-DK" sz="3200" b="1" dirty="0">
                 <a:latin typeface="Consolas" panose="020B0609020204030204" pitchFamily="49" charset="0"/>
               </a:rPr>
               <a:t> ages)</a:t>
@@ -8146,7 +8146,7 @@
           </a:p>
           <a:p>
             <a:r>
-              <a:rPr lang="da-DK" sz="3200" b="1">
+              <a:rPr lang="da-DK" sz="3200" b="1" dirty="0">
                 <a:latin typeface="Consolas" panose="020B0609020204030204" pitchFamily="49" charset="0"/>
               </a:rPr>
               <a:t>{</a:t>
@@ -8154,13 +8154,13 @@
           </a:p>
           <a:p>
             <a:r>
-              <a:rPr lang="da-DK" sz="3200" b="1">
+              <a:rPr lang="da-DK" sz="3200" b="1" dirty="0">
                 <a:latin typeface="Consolas" panose="020B0609020204030204" pitchFamily="49" charset="0"/>
               </a:rPr>
               <a:t>   </a:t>
             </a:r>
             <a:r>
-              <a:rPr lang="da-DK" sz="3200" b="1">
+              <a:rPr lang="da-DK" sz="3200" b="1" dirty="0">
                 <a:solidFill>
                   <a:schemeClr val="accent6">
                     <a:lumMod val="75000"/>
@@ -8171,7 +8171,7 @@
               <a:t>Console</a:t>
             </a:r>
             <a:r>
-              <a:rPr lang="da-DK" sz="3200" b="1">
+              <a:rPr lang="da-DK" sz="3200" b="1" dirty="0">
                 <a:latin typeface="Consolas" panose="020B0609020204030204" pitchFamily="49" charset="0"/>
               </a:rPr>
               <a:t>.WriteLine(age);</a:t>
@@ -8179,7 +8179,7 @@
           </a:p>
           <a:p>
             <a:r>
-              <a:rPr lang="da-DK" sz="3200" b="1">
+              <a:rPr lang="da-DK" sz="3200" b="1" dirty="0">
                 <a:latin typeface="Consolas" panose="020B0609020204030204" pitchFamily="49" charset="0"/>
               </a:rPr>
               <a:t>}</a:t>
@@ -8479,13 +8479,13 @@
   <p:clrMapOvr>
     <a:masterClrMapping/>
   </p:clrMapOvr>
-  <mc:AlternateContent xmlns:mc="http://schemas.openxmlformats.org/markup-compatibility/2006">
-    <mc:Choice xmlns:p14="http://schemas.microsoft.com/office/powerpoint/2010/main" Requires="p14">
+  <mc:AlternateContent xmlns:mc="http://schemas.openxmlformats.org/markup-compatibility/2006" xmlns:p14="http://schemas.microsoft.com/office/powerpoint/2010/main">
+    <mc:Choice Requires="p14">
       <p:transition spd="med" p14:dur="700">
         <p:fade/>
       </p:transition>
     </mc:Choice>
-    <mc:Fallback>
+    <mc:Fallback xmlns="">
       <p:transition spd="med">
         <p:fade/>
       </p:transition>
@@ -8668,13 +8668,13 @@
   <p:clrMapOvr>
     <a:masterClrMapping/>
   </p:clrMapOvr>
-  <mc:AlternateContent xmlns:mc="http://schemas.openxmlformats.org/markup-compatibility/2006">
-    <mc:Choice xmlns:p14="http://schemas.microsoft.com/office/powerpoint/2010/main" Requires="p14">
+  <mc:AlternateContent xmlns:mc="http://schemas.openxmlformats.org/markup-compatibility/2006" xmlns:p14="http://schemas.microsoft.com/office/powerpoint/2010/main">
+    <mc:Choice Requires="p14">
       <p:transition spd="med" p14:dur="700">
         <p:fade/>
       </p:transition>
     </mc:Choice>
-    <mc:Fallback>
+    <mc:Fallback xmlns="">
       <p:transition spd="med">
         <p:fade/>
       </p:transition>
@@ -8797,13 +8797,13 @@
   <p:clrMapOvr>
     <a:masterClrMapping/>
   </p:clrMapOvr>
-  <mc:AlternateContent xmlns:mc="http://schemas.openxmlformats.org/markup-compatibility/2006">
-    <mc:Choice xmlns:p14="http://schemas.microsoft.com/office/powerpoint/2010/main" Requires="p14">
+  <mc:AlternateContent xmlns:mc="http://schemas.openxmlformats.org/markup-compatibility/2006" xmlns:p14="http://schemas.microsoft.com/office/powerpoint/2010/main">
+    <mc:Choice Requires="p14">
       <p:transition spd="med" p14:dur="700">
         <p:fade/>
       </p:transition>
     </mc:Choice>
-    <mc:Fallback>
+    <mc:Fallback xmlns="">
       <p:transition spd="med">
         <p:fade/>
       </p:transition>
@@ -8946,13 +8946,13 @@
   <p:clrMapOvr>
     <a:masterClrMapping/>
   </p:clrMapOvr>
-  <mc:AlternateContent xmlns:mc="http://schemas.openxmlformats.org/markup-compatibility/2006">
-    <mc:Choice xmlns:p14="http://schemas.microsoft.com/office/powerpoint/2010/main" Requires="p14">
+  <mc:AlternateContent xmlns:mc="http://schemas.openxmlformats.org/markup-compatibility/2006" xmlns:p14="http://schemas.microsoft.com/office/powerpoint/2010/main">
+    <mc:Choice Requires="p14">
       <p:transition spd="med" p14:dur="700">
         <p:fade/>
       </p:transition>
     </mc:Choice>
-    <mc:Fallback>
+    <mc:Fallback xmlns="">
       <p:transition spd="med">
         <p:fade/>
       </p:transition>
@@ -9137,13 +9137,13 @@
   <p:clrMapOvr>
     <a:masterClrMapping/>
   </p:clrMapOvr>
-  <mc:AlternateContent xmlns:mc="http://schemas.openxmlformats.org/markup-compatibility/2006">
-    <mc:Choice xmlns:p14="http://schemas.microsoft.com/office/powerpoint/2010/main" Requires="p14">
+  <mc:AlternateContent xmlns:mc="http://schemas.openxmlformats.org/markup-compatibility/2006" xmlns:p14="http://schemas.microsoft.com/office/powerpoint/2010/main">
+    <mc:Choice Requires="p14">
       <p:transition spd="med" p14:dur="700">
         <p:fade/>
       </p:transition>
     </mc:Choice>
-    <mc:Fallback>
+    <mc:Fallback xmlns="">
       <p:transition spd="med">
         <p:fade/>
       </p:transition>
@@ -9537,13 +9537,13 @@
   <p:clrMapOvr>
     <a:masterClrMapping/>
   </p:clrMapOvr>
-  <mc:AlternateContent xmlns:mc="http://schemas.openxmlformats.org/markup-compatibility/2006">
-    <mc:Choice xmlns:p14="http://schemas.microsoft.com/office/powerpoint/2010/main" Requires="p14">
+  <mc:AlternateContent xmlns:mc="http://schemas.openxmlformats.org/markup-compatibility/2006" xmlns:p14="http://schemas.microsoft.com/office/powerpoint/2010/main">
+    <mc:Choice Requires="p14">
       <p:transition spd="med" p14:dur="700">
         <p:fade/>
       </p:transition>
     </mc:Choice>
-    <mc:Fallback>
+    <mc:Fallback xmlns="">
       <p:transition spd="med">
         <p:fade/>
       </p:transition>
@@ -9773,13 +9773,13 @@
   <p:clrMapOvr>
     <a:masterClrMapping/>
   </p:clrMapOvr>
-  <mc:AlternateContent xmlns:mc="http://schemas.openxmlformats.org/markup-compatibility/2006">
-    <mc:Choice xmlns:p14="http://schemas.microsoft.com/office/powerpoint/2010/main" Requires="p14">
+  <mc:AlternateContent xmlns:mc="http://schemas.openxmlformats.org/markup-compatibility/2006" xmlns:p14="http://schemas.microsoft.com/office/powerpoint/2010/main">
+    <mc:Choice Requires="p14">
       <p:transition spd="med" p14:dur="700">
         <p:fade/>
       </p:transition>
     </mc:Choice>
-    <mc:Fallback>
+    <mc:Fallback xmlns="">
       <p:transition spd="med">
         <p:fade/>
       </p:transition>
@@ -9851,13 +9851,13 @@
   <p:clrMapOvr>
     <a:masterClrMapping/>
   </p:clrMapOvr>
-  <mc:AlternateContent xmlns:mc="http://schemas.openxmlformats.org/markup-compatibility/2006">
-    <mc:Choice xmlns:p14="http://schemas.microsoft.com/office/powerpoint/2010/main" Requires="p14">
+  <mc:AlternateContent xmlns:mc="http://schemas.openxmlformats.org/markup-compatibility/2006" xmlns:p14="http://schemas.microsoft.com/office/powerpoint/2010/main">
+    <mc:Choice Requires="p14">
       <p:transition spd="med" p14:dur="700">
         <p:fade/>
       </p:transition>
     </mc:Choice>
-    <mc:Fallback>
+    <mc:Fallback xmlns="">
       <p:transition spd="med">
         <p:fade/>
       </p:transition>
@@ -10155,13 +10155,13 @@
   <p:clrMapOvr>
     <a:masterClrMapping/>
   </p:clrMapOvr>
-  <mc:AlternateContent xmlns:mc="http://schemas.openxmlformats.org/markup-compatibility/2006">
-    <mc:Choice xmlns:p14="http://schemas.microsoft.com/office/powerpoint/2010/main" Requires="p14">
+  <mc:AlternateContent xmlns:mc="http://schemas.openxmlformats.org/markup-compatibility/2006" xmlns:p14="http://schemas.microsoft.com/office/powerpoint/2010/main">
+    <mc:Choice Requires="p14">
       <p:transition spd="med" p14:dur="700">
         <p:fade/>
       </p:transition>
     </mc:Choice>
-    <mc:Fallback>
+    <mc:Fallback xmlns="">
       <p:transition spd="med">
         <p:fade/>
       </p:transition>
@@ -10326,13 +10326,13 @@
   <p:clrMapOvr>
     <a:masterClrMapping/>
   </p:clrMapOvr>
-  <mc:AlternateContent xmlns:mc="http://schemas.openxmlformats.org/markup-compatibility/2006">
-    <mc:Choice xmlns:p14="http://schemas.microsoft.com/office/powerpoint/2010/main" Requires="p14">
+  <mc:AlternateContent xmlns:mc="http://schemas.openxmlformats.org/markup-compatibility/2006" xmlns:p14="http://schemas.microsoft.com/office/powerpoint/2010/main">
+    <mc:Choice Requires="p14">
       <p:transition spd="med" p14:dur="700">
         <p:fade/>
       </p:transition>
     </mc:Choice>
-    <mc:Fallback>
+    <mc:Fallback xmlns="">
       <p:transition spd="med">
         <p:fade/>
       </p:transition>
@@ -10424,13 +10424,13 @@
   <p:clrMapOvr>
     <a:masterClrMapping/>
   </p:clrMapOvr>
-  <mc:AlternateContent xmlns:mc="http://schemas.openxmlformats.org/markup-compatibility/2006">
-    <mc:Choice xmlns:p14="http://schemas.microsoft.com/office/powerpoint/2010/main" Requires="p14">
+  <mc:AlternateContent xmlns:mc="http://schemas.openxmlformats.org/markup-compatibility/2006" xmlns:p14="http://schemas.microsoft.com/office/powerpoint/2010/main">
+    <mc:Choice Requires="p14">
       <p:transition spd="med" p14:dur="700">
         <p:fade/>
       </p:transition>
     </mc:Choice>
-    <mc:Fallback>
+    <mc:Fallback xmlns="">
       <p:transition spd="med">
         <p:fade/>
       </p:transition>
@@ -10522,13 +10522,13 @@
   <p:clrMapOvr>
     <a:masterClrMapping/>
   </p:clrMapOvr>
-  <mc:AlternateContent xmlns:mc="http://schemas.openxmlformats.org/markup-compatibility/2006">
-    <mc:Choice xmlns:p14="http://schemas.microsoft.com/office/powerpoint/2010/main" Requires="p14">
+  <mc:AlternateContent xmlns:mc="http://schemas.openxmlformats.org/markup-compatibility/2006" xmlns:p14="http://schemas.microsoft.com/office/powerpoint/2010/main">
+    <mc:Choice Requires="p14">
       <p:transition spd="med" p14:dur="700">
         <p:fade/>
       </p:transition>
     </mc:Choice>
-    <mc:Fallback>
+    <mc:Fallback xmlns="">
       <p:transition spd="med">
         <p:fade/>
       </p:transition>
@@ -10624,13 +10624,13 @@
   <p:clrMapOvr>
     <a:masterClrMapping/>
   </p:clrMapOvr>
-  <mc:AlternateContent xmlns:mc="http://schemas.openxmlformats.org/markup-compatibility/2006">
-    <mc:Choice xmlns:p14="http://schemas.microsoft.com/office/powerpoint/2010/main" Requires="p14">
+  <mc:AlternateContent xmlns:mc="http://schemas.openxmlformats.org/markup-compatibility/2006" xmlns:p14="http://schemas.microsoft.com/office/powerpoint/2010/main">
+    <mc:Choice Requires="p14">
       <p:transition spd="med" p14:dur="700">
         <p:fade/>
       </p:transition>
     </mc:Choice>
-    <mc:Fallback>
+    <mc:Fallback xmlns="">
       <p:transition spd="med">
         <p:fade/>
       </p:transition>
@@ -10722,13 +10722,13 @@
   <p:clrMapOvr>
     <a:masterClrMapping/>
   </p:clrMapOvr>
-  <mc:AlternateContent xmlns:mc="http://schemas.openxmlformats.org/markup-compatibility/2006">
-    <mc:Choice xmlns:p14="http://schemas.microsoft.com/office/powerpoint/2010/main" Requires="p14">
+  <mc:AlternateContent xmlns:mc="http://schemas.openxmlformats.org/markup-compatibility/2006" xmlns:p14="http://schemas.microsoft.com/office/powerpoint/2010/main">
+    <mc:Choice Requires="p14">
       <p:transition spd="med" p14:dur="700">
         <p:fade/>
       </p:transition>
     </mc:Choice>
-    <mc:Fallback>
+    <mc:Fallback xmlns="">
       <p:transition spd="med">
         <p:fade/>
       </p:transition>
@@ -10963,13 +10963,13 @@
   <p:clrMapOvr>
     <a:masterClrMapping/>
   </p:clrMapOvr>
-  <mc:AlternateContent xmlns:mc="http://schemas.openxmlformats.org/markup-compatibility/2006">
-    <mc:Choice xmlns:p14="http://schemas.microsoft.com/office/powerpoint/2010/main" Requires="p14">
+  <mc:AlternateContent xmlns:mc="http://schemas.openxmlformats.org/markup-compatibility/2006" xmlns:p14="http://schemas.microsoft.com/office/powerpoint/2010/main">
+    <mc:Choice Requires="p14">
       <p:transition spd="med" p14:dur="700">
         <p:fade/>
       </p:transition>
     </mc:Choice>
-    <mc:Fallback>
+    <mc:Fallback xmlns="">
       <p:transition spd="med">
         <p:fade/>
       </p:transition>
@@ -11340,13 +11340,13 @@
   <p:clrMapOvr>
     <a:masterClrMapping/>
   </p:clrMapOvr>
-  <mc:AlternateContent xmlns:mc="http://schemas.openxmlformats.org/markup-compatibility/2006">
-    <mc:Choice xmlns:p14="http://schemas.microsoft.com/office/powerpoint/2010/main" Requires="p14">
+  <mc:AlternateContent xmlns:mc="http://schemas.openxmlformats.org/markup-compatibility/2006" xmlns:p14="http://schemas.microsoft.com/office/powerpoint/2010/main">
+    <mc:Choice Requires="p14">
       <p:transition spd="med" p14:dur="700">
         <p:fade/>
       </p:transition>
     </mc:Choice>
-    <mc:Fallback>
+    <mc:Fallback xmlns="">
       <p:transition spd="med">
         <p:fade/>
       </p:transition>
@@ -11739,13 +11739,13 @@
   <p:clrMapOvr>
     <a:masterClrMapping/>
   </p:clrMapOvr>
-  <mc:AlternateContent xmlns:mc="http://schemas.openxmlformats.org/markup-compatibility/2006">
-    <mc:Choice xmlns:p14="http://schemas.microsoft.com/office/powerpoint/2010/main" Requires="p14">
+  <mc:AlternateContent xmlns:mc="http://schemas.openxmlformats.org/markup-compatibility/2006" xmlns:p14="http://schemas.microsoft.com/office/powerpoint/2010/main">
+    <mc:Choice Requires="p14">
       <p:transition spd="med" p14:dur="700">
         <p:fade/>
       </p:transition>
     </mc:Choice>
-    <mc:Fallback>
+    <mc:Fallback xmlns="">
       <p:transition spd="med">
         <p:fade/>
       </p:transition>
@@ -12246,13 +12246,13 @@
   <p:clrMapOvr>
     <a:masterClrMapping/>
   </p:clrMapOvr>
-  <mc:AlternateContent xmlns:mc="http://schemas.openxmlformats.org/markup-compatibility/2006">
-    <mc:Choice xmlns:p14="http://schemas.microsoft.com/office/powerpoint/2010/main" Requires="p14">
+  <mc:AlternateContent xmlns:mc="http://schemas.openxmlformats.org/markup-compatibility/2006" xmlns:p14="http://schemas.microsoft.com/office/powerpoint/2010/main">
+    <mc:Choice Requires="p14">
       <p:transition spd="med" p14:dur="700">
         <p:fade/>
       </p:transition>
     </mc:Choice>
-    <mc:Fallback>
+    <mc:Fallback xmlns="">
       <p:transition spd="med">
         <p:fade/>
       </p:transition>
@@ -12867,13 +12867,13 @@
   <p:clrMapOvr>
     <a:masterClrMapping/>
   </p:clrMapOvr>
-  <mc:AlternateContent xmlns:mc="http://schemas.openxmlformats.org/markup-compatibility/2006">
-    <mc:Choice xmlns:p14="http://schemas.microsoft.com/office/powerpoint/2010/main" Requires="p14">
+  <mc:AlternateContent xmlns:mc="http://schemas.openxmlformats.org/markup-compatibility/2006" xmlns:p14="http://schemas.microsoft.com/office/powerpoint/2010/main">
+    <mc:Choice Requires="p14">
       <p:transition spd="med" p14:dur="700">
         <p:fade/>
       </p:transition>
     </mc:Choice>
-    <mc:Fallback>
+    <mc:Fallback xmlns="">
       <p:transition spd="med">
         <p:fade/>
       </p:transition>
@@ -12949,13 +12949,13 @@
   <p:clrMapOvr>
     <a:masterClrMapping/>
   </p:clrMapOvr>
-  <mc:AlternateContent xmlns:mc="http://schemas.openxmlformats.org/markup-compatibility/2006">
-    <mc:Choice xmlns:p14="http://schemas.microsoft.com/office/powerpoint/2010/main" Requires="p14">
+  <mc:AlternateContent xmlns:mc="http://schemas.openxmlformats.org/markup-compatibility/2006" xmlns:p14="http://schemas.microsoft.com/office/powerpoint/2010/main">
+    <mc:Choice Requires="p14">
       <p:transition spd="med" p14:dur="700">
         <p:fade/>
       </p:transition>
     </mc:Choice>
-    <mc:Fallback>
+    <mc:Fallback xmlns="">
       <p:transition spd="med">
         <p:fade/>
       </p:transition>
@@ -13472,13 +13472,13 @@
   <p:clrMapOvr>
     <a:masterClrMapping/>
   </p:clrMapOvr>
-  <mc:AlternateContent xmlns:mc="http://schemas.openxmlformats.org/markup-compatibility/2006">
-    <mc:Choice xmlns:p14="http://schemas.microsoft.com/office/powerpoint/2010/main" Requires="p14">
+  <mc:AlternateContent xmlns:mc="http://schemas.openxmlformats.org/markup-compatibility/2006" xmlns:p14="http://schemas.microsoft.com/office/powerpoint/2010/main">
+    <mc:Choice Requires="p14">
       <p:transition spd="med" p14:dur="700">
         <p:fade/>
       </p:transition>
     </mc:Choice>
-    <mc:Fallback>
+    <mc:Fallback xmlns="">
       <p:transition spd="med">
         <p:fade/>
       </p:transition>
@@ -13959,13 +13959,13 @@
   <p:clrMapOvr>
     <a:masterClrMapping/>
   </p:clrMapOvr>
-  <mc:AlternateContent xmlns:mc="http://schemas.openxmlformats.org/markup-compatibility/2006">
-    <mc:Choice xmlns:p14="http://schemas.microsoft.com/office/powerpoint/2010/main" Requires="p14">
+  <mc:AlternateContent xmlns:mc="http://schemas.openxmlformats.org/markup-compatibility/2006" xmlns:p14="http://schemas.microsoft.com/office/powerpoint/2010/main">
+    <mc:Choice Requires="p14">
       <p:transition spd="med" p14:dur="700">
         <p:fade/>
       </p:transition>
     </mc:Choice>
-    <mc:Fallback>
+    <mc:Fallback xmlns="">
       <p:transition spd="med">
         <p:fade/>
       </p:transition>
@@ -14361,13 +14361,13 @@
   <p:clrMapOvr>
     <a:masterClrMapping/>
   </p:clrMapOvr>
-  <mc:AlternateContent xmlns:mc="http://schemas.openxmlformats.org/markup-compatibility/2006">
-    <mc:Choice xmlns:p14="http://schemas.microsoft.com/office/powerpoint/2010/main" Requires="p14">
+  <mc:AlternateContent xmlns:mc="http://schemas.openxmlformats.org/markup-compatibility/2006" xmlns:p14="http://schemas.microsoft.com/office/powerpoint/2010/main">
+    <mc:Choice Requires="p14">
       <p:transition spd="med" p14:dur="700">
         <p:fade/>
       </p:transition>
     </mc:Choice>
-    <mc:Fallback>
+    <mc:Fallback xmlns="">
       <p:transition spd="med">
         <p:fade/>
       </p:transition>
@@ -14483,13 +14483,13 @@
   <p:clrMapOvr>
     <a:masterClrMapping/>
   </p:clrMapOvr>
-  <mc:AlternateContent xmlns:mc="http://schemas.openxmlformats.org/markup-compatibility/2006">
-    <mc:Choice xmlns:p14="http://schemas.microsoft.com/office/powerpoint/2010/main" Requires="p14">
+  <mc:AlternateContent xmlns:mc="http://schemas.openxmlformats.org/markup-compatibility/2006" xmlns:p14="http://schemas.microsoft.com/office/powerpoint/2010/main">
+    <mc:Choice Requires="p14">
       <p:transition spd="med" p14:dur="700">
         <p:fade/>
       </p:transition>
     </mc:Choice>
-    <mc:Fallback>
+    <mc:Fallback xmlns="">
       <p:transition spd="med">
         <p:fade/>
       </p:transition>
@@ -14827,13 +14827,13 @@
   <p:clrMapOvr>
     <a:masterClrMapping/>
   </p:clrMapOvr>
-  <mc:AlternateContent xmlns:mc="http://schemas.openxmlformats.org/markup-compatibility/2006">
-    <mc:Choice xmlns:p14="http://schemas.microsoft.com/office/powerpoint/2010/main" Requires="p14">
+  <mc:AlternateContent xmlns:mc="http://schemas.openxmlformats.org/markup-compatibility/2006" xmlns:p14="http://schemas.microsoft.com/office/powerpoint/2010/main">
+    <mc:Choice Requires="p14">
       <p:transition spd="med" p14:dur="700">
         <p:fade/>
       </p:transition>
     </mc:Choice>
-    <mc:Fallback>
+    <mc:Fallback xmlns="">
       <p:transition spd="med">
         <p:fade/>
       </p:transition>
@@ -15171,13 +15171,13 @@
   <p:clrMapOvr>
     <a:masterClrMapping/>
   </p:clrMapOvr>
-  <mc:AlternateContent xmlns:mc="http://schemas.openxmlformats.org/markup-compatibility/2006">
-    <mc:Choice xmlns:p14="http://schemas.microsoft.com/office/powerpoint/2010/main" Requires="p14">
+  <mc:AlternateContent xmlns:mc="http://schemas.openxmlformats.org/markup-compatibility/2006" xmlns:p14="http://schemas.microsoft.com/office/powerpoint/2010/main">
+    <mc:Choice Requires="p14">
       <p:transition spd="med" p14:dur="700">
         <p:fade/>
       </p:transition>
     </mc:Choice>
-    <mc:Fallback>
+    <mc:Fallback xmlns="">
       <p:transition spd="med">
         <p:fade/>
       </p:transition>
@@ -15783,13 +15783,13 @@
   <p:clrMapOvr>
     <a:masterClrMapping/>
   </p:clrMapOvr>
-  <mc:AlternateContent xmlns:mc="http://schemas.openxmlformats.org/markup-compatibility/2006">
-    <mc:Choice xmlns:p14="http://schemas.microsoft.com/office/powerpoint/2010/main" Requires="p14">
+  <mc:AlternateContent xmlns:mc="http://schemas.openxmlformats.org/markup-compatibility/2006" xmlns:p14="http://schemas.microsoft.com/office/powerpoint/2010/main">
+    <mc:Choice Requires="p14">
       <p:transition spd="med" p14:dur="700">
         <p:fade/>
       </p:transition>
     </mc:Choice>
-    <mc:Fallback>
+    <mc:Fallback xmlns="">
       <p:transition spd="med">
         <p:fade/>
       </p:transition>
@@ -16395,13 +16395,13 @@
   <p:clrMapOvr>
     <a:masterClrMapping/>
   </p:clrMapOvr>
-  <mc:AlternateContent xmlns:mc="http://schemas.openxmlformats.org/markup-compatibility/2006">
-    <mc:Choice xmlns:p14="http://schemas.microsoft.com/office/powerpoint/2010/main" Requires="p14">
+  <mc:AlternateContent xmlns:mc="http://schemas.openxmlformats.org/markup-compatibility/2006" xmlns:p14="http://schemas.microsoft.com/office/powerpoint/2010/main">
+    <mc:Choice Requires="p14">
       <p:transition spd="med" p14:dur="700">
         <p:fade/>
       </p:transition>
     </mc:Choice>
-    <mc:Fallback>
+    <mc:Fallback xmlns="">
       <p:transition spd="med">
         <p:fade/>
       </p:transition>
@@ -17007,13 +17007,13 @@
   <p:clrMapOvr>
     <a:masterClrMapping/>
   </p:clrMapOvr>
-  <mc:AlternateContent xmlns:mc="http://schemas.openxmlformats.org/markup-compatibility/2006">
-    <mc:Choice xmlns:p14="http://schemas.microsoft.com/office/powerpoint/2010/main" Requires="p14">
+  <mc:AlternateContent xmlns:mc="http://schemas.openxmlformats.org/markup-compatibility/2006" xmlns:p14="http://schemas.microsoft.com/office/powerpoint/2010/main">
+    <mc:Choice Requires="p14">
       <p:transition spd="med" p14:dur="700">
         <p:fade/>
       </p:transition>
     </mc:Choice>
-    <mc:Fallback>
+    <mc:Fallback xmlns="">
       <p:transition spd="med">
         <p:fade/>
       </p:transition>
@@ -17619,13 +17619,13 @@
   <p:clrMapOvr>
     <a:masterClrMapping/>
   </p:clrMapOvr>
-  <mc:AlternateContent xmlns:mc="http://schemas.openxmlformats.org/markup-compatibility/2006">
-    <mc:Choice xmlns:p14="http://schemas.microsoft.com/office/powerpoint/2010/main" Requires="p14">
+  <mc:AlternateContent xmlns:mc="http://schemas.openxmlformats.org/markup-compatibility/2006" xmlns:p14="http://schemas.microsoft.com/office/powerpoint/2010/main">
+    <mc:Choice Requires="p14">
       <p:transition spd="med" p14:dur="700">
         <p:fade/>
       </p:transition>
     </mc:Choice>
-    <mc:Fallback>
+    <mc:Fallback xmlns="">
       <p:transition spd="med">
         <p:fade/>
       </p:transition>
@@ -17795,13 +17795,13 @@
   <p:clrMapOvr>
     <a:masterClrMapping/>
   </p:clrMapOvr>
-  <mc:AlternateContent xmlns:mc="http://schemas.openxmlformats.org/markup-compatibility/2006">
-    <mc:Choice xmlns:p14="http://schemas.microsoft.com/office/powerpoint/2010/main" Requires="p14">
+  <mc:AlternateContent xmlns:mc="http://schemas.openxmlformats.org/markup-compatibility/2006" xmlns:p14="http://schemas.microsoft.com/office/powerpoint/2010/main">
+    <mc:Choice Requires="p14">
       <p:transition spd="med" p14:dur="700">
         <p:fade/>
       </p:transition>
     </mc:Choice>
-    <mc:Fallback>
+    <mc:Fallback xmlns="">
       <p:transition spd="med">
         <p:fade/>
       </p:transition>
@@ -18270,13 +18270,13 @@
   <p:clrMapOvr>
     <a:masterClrMapping/>
   </p:clrMapOvr>
-  <mc:AlternateContent xmlns:mc="http://schemas.openxmlformats.org/markup-compatibility/2006">
-    <mc:Choice xmlns:p14="http://schemas.microsoft.com/office/powerpoint/2010/main" Requires="p14">
+  <mc:AlternateContent xmlns:mc="http://schemas.openxmlformats.org/markup-compatibility/2006" xmlns:p14="http://schemas.microsoft.com/office/powerpoint/2010/main">
+    <mc:Choice Requires="p14">
       <p:transition spd="med" p14:dur="700">
         <p:fade/>
       </p:transition>
     </mc:Choice>
-    <mc:Fallback>
+    <mc:Fallback xmlns="">
       <p:transition spd="med">
         <p:fade/>
       </p:transition>
@@ -18795,13 +18795,13 @@
   <p:clrMapOvr>
     <a:masterClrMapping/>
   </p:clrMapOvr>
-  <mc:AlternateContent xmlns:mc="http://schemas.openxmlformats.org/markup-compatibility/2006">
-    <mc:Choice xmlns:p14="http://schemas.microsoft.com/office/powerpoint/2010/main" Requires="p14">
+  <mc:AlternateContent xmlns:mc="http://schemas.openxmlformats.org/markup-compatibility/2006" xmlns:p14="http://schemas.microsoft.com/office/powerpoint/2010/main">
+    <mc:Choice Requires="p14">
       <p:transition spd="med" p14:dur="700">
         <p:fade/>
       </p:transition>
     </mc:Choice>
-    <mc:Fallback>
+    <mc:Fallback xmlns="">
       <p:transition spd="med">
         <p:fade/>
       </p:transition>
@@ -19448,13 +19448,13 @@
   <p:clrMapOvr>
     <a:masterClrMapping/>
   </p:clrMapOvr>
-  <mc:AlternateContent xmlns:mc="http://schemas.openxmlformats.org/markup-compatibility/2006">
-    <mc:Choice xmlns:p14="http://schemas.microsoft.com/office/powerpoint/2010/main" Requires="p14">
+  <mc:AlternateContent xmlns:mc="http://schemas.openxmlformats.org/markup-compatibility/2006" xmlns:p14="http://schemas.microsoft.com/office/powerpoint/2010/main">
+    <mc:Choice Requires="p14">
       <p:transition spd="med" p14:dur="700">
         <p:fade/>
       </p:transition>
     </mc:Choice>
-    <mc:Fallback>
+    <mc:Fallback xmlns="">
       <p:transition spd="med">
         <p:fade/>
       </p:transition>
@@ -20237,13 +20237,13 @@
   <p:clrMapOvr>
     <a:masterClrMapping/>
   </p:clrMapOvr>
-  <mc:AlternateContent xmlns:mc="http://schemas.openxmlformats.org/markup-compatibility/2006">
-    <mc:Choice xmlns:p14="http://schemas.microsoft.com/office/powerpoint/2010/main" Requires="p14">
+  <mc:AlternateContent xmlns:mc="http://schemas.openxmlformats.org/markup-compatibility/2006" xmlns:p14="http://schemas.microsoft.com/office/powerpoint/2010/main">
+    <mc:Choice Requires="p14">
       <p:transition spd="med" p14:dur="700">
         <p:fade/>
       </p:transition>
     </mc:Choice>
-    <mc:Fallback>
+    <mc:Fallback xmlns="">
       <p:transition spd="med">
         <p:fade/>
       </p:transition>
@@ -20475,13 +20475,13 @@
   <p:clrMapOvr>
     <a:masterClrMapping/>
   </p:clrMapOvr>
-  <mc:AlternateContent xmlns:mc="http://schemas.openxmlformats.org/markup-compatibility/2006">
-    <mc:Choice xmlns:p14="http://schemas.microsoft.com/office/powerpoint/2010/main" Requires="p14">
+  <mc:AlternateContent xmlns:mc="http://schemas.openxmlformats.org/markup-compatibility/2006" xmlns:p14="http://schemas.microsoft.com/office/powerpoint/2010/main">
+    <mc:Choice Requires="p14">
       <p:transition spd="med" p14:dur="700">
         <p:fade/>
       </p:transition>
     </mc:Choice>
-    <mc:Fallback>
+    <mc:Fallback xmlns="">
       <p:transition spd="med">
         <p:fade/>
       </p:transition>
@@ -20734,13 +20734,13 @@
   <p:clrMapOvr>
     <a:masterClrMapping/>
   </p:clrMapOvr>
-  <mc:AlternateContent xmlns:mc="http://schemas.openxmlformats.org/markup-compatibility/2006">
-    <mc:Choice xmlns:p14="http://schemas.microsoft.com/office/powerpoint/2010/main" Requires="p14">
+  <mc:AlternateContent xmlns:mc="http://schemas.openxmlformats.org/markup-compatibility/2006" xmlns:p14="http://schemas.microsoft.com/office/powerpoint/2010/main">
+    <mc:Choice Requires="p14">
       <p:transition spd="med" p14:dur="700">
         <p:fade/>
       </p:transition>
     </mc:Choice>
-    <mc:Fallback>
+    <mc:Fallback xmlns="">
       <p:transition spd="med">
         <p:fade/>
       </p:transition>
@@ -20847,13 +20847,13 @@
   <p:clrMapOvr>
     <a:masterClrMapping/>
   </p:clrMapOvr>
-  <mc:AlternateContent xmlns:mc="http://schemas.openxmlformats.org/markup-compatibility/2006">
-    <mc:Choice xmlns:p14="http://schemas.microsoft.com/office/powerpoint/2010/main" Requires="p14">
+  <mc:AlternateContent xmlns:mc="http://schemas.openxmlformats.org/markup-compatibility/2006" xmlns:p14="http://schemas.microsoft.com/office/powerpoint/2010/main">
+    <mc:Choice Requires="p14">
       <p:transition spd="med" p14:dur="700">
         <p:fade/>
       </p:transition>
     </mc:Choice>
-    <mc:Fallback>
+    <mc:Fallback xmlns="">
       <p:transition spd="med">
         <p:fade/>
       </p:transition>
@@ -20965,13 +20965,13 @@
   <p:clrMapOvr>
     <a:masterClrMapping/>
   </p:clrMapOvr>
-  <mc:AlternateContent xmlns:mc="http://schemas.openxmlformats.org/markup-compatibility/2006">
-    <mc:Choice xmlns:p14="http://schemas.microsoft.com/office/powerpoint/2010/main" Requires="p14">
+  <mc:AlternateContent xmlns:mc="http://schemas.openxmlformats.org/markup-compatibility/2006" xmlns:p14="http://schemas.microsoft.com/office/powerpoint/2010/main">
+    <mc:Choice Requires="p14">
       <p:transition spd="med" p14:dur="700">
         <p:fade/>
       </p:transition>
     </mc:Choice>
-    <mc:Fallback>
+    <mc:Fallback xmlns="">
       <p:transition spd="med">
         <p:fade/>
       </p:transition>
